--- a/ゲーム科1年/01_後期/プログラミングⅢ/14_継承時のコンストラクタとデストラクタ.pptx
+++ b/ゲーム科1年/01_後期/プログラミングⅢ/14_継承時のコンストラクタとデストラクタ.pptx
@@ -267,7 +267,7 @@
           <a:p>
             <a:fld id="{E9CC885B-4903-4D54-9A93-00025F12DED9}" type="datetimeFigureOut">
               <a:rPr kumimoji="1" lang="ja-JP" altLang="en-US" smtClean="0"/>
-              <a:t>2024/11/11</a:t>
+              <a:t>2025/3/3</a:t>
             </a:fld>
             <a:endParaRPr kumimoji="1" lang="ja-JP" altLang="en-US"/>
           </a:p>
@@ -497,7 +497,7 @@
           <a:p>
             <a:fld id="{E9CC885B-4903-4D54-9A93-00025F12DED9}" type="datetimeFigureOut">
               <a:rPr kumimoji="1" lang="ja-JP" altLang="en-US" smtClean="0"/>
-              <a:t>2024/11/11</a:t>
+              <a:t>2025/3/3</a:t>
             </a:fld>
             <a:endParaRPr kumimoji="1" lang="ja-JP" altLang="en-US"/>
           </a:p>
@@ -737,7 +737,7 @@
           <a:p>
             <a:fld id="{E9CC885B-4903-4D54-9A93-00025F12DED9}" type="datetimeFigureOut">
               <a:rPr kumimoji="1" lang="ja-JP" altLang="en-US" smtClean="0"/>
-              <a:t>2024/11/11</a:t>
+              <a:t>2025/3/3</a:t>
             </a:fld>
             <a:endParaRPr kumimoji="1" lang="ja-JP" altLang="en-US"/>
           </a:p>
@@ -967,7 +967,7 @@
           <a:p>
             <a:fld id="{E9CC885B-4903-4D54-9A93-00025F12DED9}" type="datetimeFigureOut">
               <a:rPr kumimoji="1" lang="ja-JP" altLang="en-US" smtClean="0"/>
-              <a:t>2024/11/11</a:t>
+              <a:t>2025/3/3</a:t>
             </a:fld>
             <a:endParaRPr kumimoji="1" lang="ja-JP" altLang="en-US"/>
           </a:p>
@@ -1242,7 +1242,7 @@
           <a:p>
             <a:fld id="{E9CC885B-4903-4D54-9A93-00025F12DED9}" type="datetimeFigureOut">
               <a:rPr kumimoji="1" lang="ja-JP" altLang="en-US" smtClean="0"/>
-              <a:t>2024/11/11</a:t>
+              <a:t>2025/3/3</a:t>
             </a:fld>
             <a:endParaRPr kumimoji="1" lang="ja-JP" altLang="en-US"/>
           </a:p>
@@ -1571,7 +1571,7 @@
           <a:p>
             <a:fld id="{E9CC885B-4903-4D54-9A93-00025F12DED9}" type="datetimeFigureOut">
               <a:rPr kumimoji="1" lang="ja-JP" altLang="en-US" smtClean="0"/>
-              <a:t>2024/11/11</a:t>
+              <a:t>2025/3/3</a:t>
             </a:fld>
             <a:endParaRPr kumimoji="1" lang="ja-JP" altLang="en-US"/>
           </a:p>
@@ -2047,7 +2047,7 @@
           <a:p>
             <a:fld id="{E9CC885B-4903-4D54-9A93-00025F12DED9}" type="datetimeFigureOut">
               <a:rPr kumimoji="1" lang="ja-JP" altLang="en-US" smtClean="0"/>
-              <a:t>2024/11/11</a:t>
+              <a:t>2025/3/3</a:t>
             </a:fld>
             <a:endParaRPr kumimoji="1" lang="ja-JP" altLang="en-US"/>
           </a:p>
@@ -2188,7 +2188,7 @@
           <a:p>
             <a:fld id="{E9CC885B-4903-4D54-9A93-00025F12DED9}" type="datetimeFigureOut">
               <a:rPr kumimoji="1" lang="ja-JP" altLang="en-US" smtClean="0"/>
-              <a:t>2024/11/11</a:t>
+              <a:t>2025/3/3</a:t>
             </a:fld>
             <a:endParaRPr kumimoji="1" lang="ja-JP" altLang="en-US"/>
           </a:p>
@@ -2301,7 +2301,7 @@
           <a:p>
             <a:fld id="{E9CC885B-4903-4D54-9A93-00025F12DED9}" type="datetimeFigureOut">
               <a:rPr kumimoji="1" lang="ja-JP" altLang="en-US" smtClean="0"/>
-              <a:t>2024/11/11</a:t>
+              <a:t>2025/3/3</a:t>
             </a:fld>
             <a:endParaRPr kumimoji="1" lang="ja-JP" altLang="en-US"/>
           </a:p>
@@ -2644,7 +2644,7 @@
           <a:p>
             <a:fld id="{E9CC885B-4903-4D54-9A93-00025F12DED9}" type="datetimeFigureOut">
               <a:rPr kumimoji="1" lang="ja-JP" altLang="en-US" smtClean="0"/>
-              <a:t>2024/11/11</a:t>
+              <a:t>2025/3/3</a:t>
             </a:fld>
             <a:endParaRPr kumimoji="1" lang="ja-JP" altLang="en-US"/>
           </a:p>
@@ -2932,7 +2932,7 @@
           <a:p>
             <a:fld id="{E9CC885B-4903-4D54-9A93-00025F12DED9}" type="datetimeFigureOut">
               <a:rPr kumimoji="1" lang="ja-JP" altLang="en-US" smtClean="0"/>
-              <a:t>2024/11/11</a:t>
+              <a:t>2025/3/3</a:t>
             </a:fld>
             <a:endParaRPr kumimoji="1" lang="ja-JP" altLang="en-US"/>
           </a:p>
@@ -3205,7 +3205,7 @@
           <a:p>
             <a:fld id="{E9CC885B-4903-4D54-9A93-00025F12DED9}" type="datetimeFigureOut">
               <a:rPr kumimoji="1" lang="ja-JP" altLang="en-US" smtClean="0"/>
-              <a:t>2024/11/11</a:t>
+              <a:t>2025/3/3</a:t>
             </a:fld>
             <a:endParaRPr kumimoji="1" lang="ja-JP" altLang="en-US"/>
           </a:p>
@@ -4668,7 +4668,15 @@
           <a:p>
             <a:r>
               <a:rPr lang="ja-JP" altLang="en-US" sz="2400" dirty="0"/>
-              <a:t>原因はポインタ変数自体が</a:t>
+              <a:t>原因は</a:t>
+            </a:r>
+            <a:r>
+              <a:rPr lang="ja-JP" altLang="en-US" sz="2400" b="1" dirty="0">
+                <a:solidFill>
+                  <a:srgbClr val="FF0000"/>
+                </a:solidFill>
+              </a:rPr>
+              <a:t>ポインタ変数自体が</a:t>
             </a:r>
             <a:r>
               <a:rPr lang="en-US" altLang="ja-JP" sz="2400" b="1" dirty="0">
@@ -4679,8 +4687,24 @@
               <a:t>Food</a:t>
             </a:r>
             <a:r>
+              <a:rPr lang="ja-JP" altLang="en-US" sz="2400" b="1" dirty="0">
+                <a:solidFill>
+                  <a:srgbClr val="00B050"/>
+                </a:solidFill>
+              </a:rPr>
+              <a:t>クラス</a:t>
+            </a:r>
+            <a:r>
+              <a:rPr lang="ja-JP" altLang="en-US" sz="2400" b="1" dirty="0">
+                <a:solidFill>
+                  <a:srgbClr val="FF0000"/>
+                </a:solidFill>
+              </a:rPr>
+              <a:t>だから</a:t>
+            </a:r>
+            <a:r>
               <a:rPr lang="ja-JP" altLang="en-US" sz="2400" dirty="0"/>
-              <a:t>クラスだからです。</a:t>
+              <a:t>です。</a:t>
             </a:r>
             <a:endParaRPr lang="en-US" altLang="ja-JP" sz="2400" dirty="0"/>
           </a:p>
@@ -4717,19 +4741,7 @@
           <a:p>
             <a:r>
               <a:rPr lang="ja-JP" altLang="en-US" sz="2400" dirty="0"/>
-              <a:t>しかし、</a:t>
-            </a:r>
-            <a:r>
-              <a:rPr lang="en-US" altLang="ja-JP" sz="2400" b="1" dirty="0">
-                <a:solidFill>
-                  <a:srgbClr val="00B050"/>
-                </a:solidFill>
-              </a:rPr>
-              <a:t>Food</a:t>
-            </a:r>
-            <a:r>
-              <a:rPr lang="ja-JP" altLang="en-US" sz="2400" dirty="0"/>
-              <a:t>ポインタは</a:t>
+              <a:t>しかし、元々は</a:t>
             </a:r>
             <a:r>
               <a:rPr lang="en-US" altLang="ja-JP" sz="2400" b="1" dirty="0">
@@ -4741,7 +4753,7 @@
             </a:r>
             <a:r>
               <a:rPr lang="ja-JP" altLang="en-US" sz="2400" dirty="0"/>
-              <a:t>も</a:t>
+              <a:t>や</a:t>
             </a:r>
             <a:r>
               <a:rPr lang="en-US" altLang="ja-JP" sz="2400" b="1" dirty="0">
@@ -4753,7 +4765,7 @@
             </a:r>
             <a:r>
               <a:rPr lang="ja-JP" altLang="en-US" sz="2400" dirty="0"/>
-              <a:t>も参照できるため、</a:t>
+              <a:t>で生成しているため、</a:t>
             </a:r>
             <a:endParaRPr lang="en-US" altLang="ja-JP" sz="2400" dirty="0"/>
           </a:p>

--- a/ゲーム科1年/01_後期/プログラミングⅢ/14_継承時のコンストラクタとデストラクタ.pptx
+++ b/ゲーム科1年/01_後期/プログラミングⅢ/14_継承時のコンストラクタとデストラクタ.pptx
@@ -267,7 +267,7 @@
           <a:p>
             <a:fld id="{E9CC885B-4903-4D54-9A93-00025F12DED9}" type="datetimeFigureOut">
               <a:rPr kumimoji="1" lang="ja-JP" altLang="en-US" smtClean="0"/>
-              <a:t>2025/3/3</a:t>
+              <a:t>2025/7/31</a:t>
             </a:fld>
             <a:endParaRPr kumimoji="1" lang="ja-JP" altLang="en-US"/>
           </a:p>
@@ -497,7 +497,7 @@
           <a:p>
             <a:fld id="{E9CC885B-4903-4D54-9A93-00025F12DED9}" type="datetimeFigureOut">
               <a:rPr kumimoji="1" lang="ja-JP" altLang="en-US" smtClean="0"/>
-              <a:t>2025/3/3</a:t>
+              <a:t>2025/7/31</a:t>
             </a:fld>
             <a:endParaRPr kumimoji="1" lang="ja-JP" altLang="en-US"/>
           </a:p>
@@ -737,7 +737,7 @@
           <a:p>
             <a:fld id="{E9CC885B-4903-4D54-9A93-00025F12DED9}" type="datetimeFigureOut">
               <a:rPr kumimoji="1" lang="ja-JP" altLang="en-US" smtClean="0"/>
-              <a:t>2025/3/3</a:t>
+              <a:t>2025/7/31</a:t>
             </a:fld>
             <a:endParaRPr kumimoji="1" lang="ja-JP" altLang="en-US"/>
           </a:p>
@@ -967,7 +967,7 @@
           <a:p>
             <a:fld id="{E9CC885B-4903-4D54-9A93-00025F12DED9}" type="datetimeFigureOut">
               <a:rPr kumimoji="1" lang="ja-JP" altLang="en-US" smtClean="0"/>
-              <a:t>2025/3/3</a:t>
+              <a:t>2025/7/31</a:t>
             </a:fld>
             <a:endParaRPr kumimoji="1" lang="ja-JP" altLang="en-US"/>
           </a:p>
@@ -1242,7 +1242,7 @@
           <a:p>
             <a:fld id="{E9CC885B-4903-4D54-9A93-00025F12DED9}" type="datetimeFigureOut">
               <a:rPr kumimoji="1" lang="ja-JP" altLang="en-US" smtClean="0"/>
-              <a:t>2025/3/3</a:t>
+              <a:t>2025/7/31</a:t>
             </a:fld>
             <a:endParaRPr kumimoji="1" lang="ja-JP" altLang="en-US"/>
           </a:p>
@@ -1571,7 +1571,7 @@
           <a:p>
             <a:fld id="{E9CC885B-4903-4D54-9A93-00025F12DED9}" type="datetimeFigureOut">
               <a:rPr kumimoji="1" lang="ja-JP" altLang="en-US" smtClean="0"/>
-              <a:t>2025/3/3</a:t>
+              <a:t>2025/7/31</a:t>
             </a:fld>
             <a:endParaRPr kumimoji="1" lang="ja-JP" altLang="en-US"/>
           </a:p>
@@ -2047,7 +2047,7 @@
           <a:p>
             <a:fld id="{E9CC885B-4903-4D54-9A93-00025F12DED9}" type="datetimeFigureOut">
               <a:rPr kumimoji="1" lang="ja-JP" altLang="en-US" smtClean="0"/>
-              <a:t>2025/3/3</a:t>
+              <a:t>2025/7/31</a:t>
             </a:fld>
             <a:endParaRPr kumimoji="1" lang="ja-JP" altLang="en-US"/>
           </a:p>
@@ -2188,7 +2188,7 @@
           <a:p>
             <a:fld id="{E9CC885B-4903-4D54-9A93-00025F12DED9}" type="datetimeFigureOut">
               <a:rPr kumimoji="1" lang="ja-JP" altLang="en-US" smtClean="0"/>
-              <a:t>2025/3/3</a:t>
+              <a:t>2025/7/31</a:t>
             </a:fld>
             <a:endParaRPr kumimoji="1" lang="ja-JP" altLang="en-US"/>
           </a:p>
@@ -2301,7 +2301,7 @@
           <a:p>
             <a:fld id="{E9CC885B-4903-4D54-9A93-00025F12DED9}" type="datetimeFigureOut">
               <a:rPr kumimoji="1" lang="ja-JP" altLang="en-US" smtClean="0"/>
-              <a:t>2025/3/3</a:t>
+              <a:t>2025/7/31</a:t>
             </a:fld>
             <a:endParaRPr kumimoji="1" lang="ja-JP" altLang="en-US"/>
           </a:p>
@@ -2644,7 +2644,7 @@
           <a:p>
             <a:fld id="{E9CC885B-4903-4D54-9A93-00025F12DED9}" type="datetimeFigureOut">
               <a:rPr kumimoji="1" lang="ja-JP" altLang="en-US" smtClean="0"/>
-              <a:t>2025/3/3</a:t>
+              <a:t>2025/7/31</a:t>
             </a:fld>
             <a:endParaRPr kumimoji="1" lang="ja-JP" altLang="en-US"/>
           </a:p>
@@ -2932,7 +2932,7 @@
           <a:p>
             <a:fld id="{E9CC885B-4903-4D54-9A93-00025F12DED9}" type="datetimeFigureOut">
               <a:rPr kumimoji="1" lang="ja-JP" altLang="en-US" smtClean="0"/>
-              <a:t>2025/3/3</a:t>
+              <a:t>2025/7/31</a:t>
             </a:fld>
             <a:endParaRPr kumimoji="1" lang="ja-JP" altLang="en-US"/>
           </a:p>
@@ -3205,7 +3205,7 @@
           <a:p>
             <a:fld id="{E9CC885B-4903-4D54-9A93-00025F12DED9}" type="datetimeFigureOut">
               <a:rPr kumimoji="1" lang="ja-JP" altLang="en-US" smtClean="0"/>
-              <a:t>2025/3/3</a:t>
+              <a:t>2025/7/31</a:t>
             </a:fld>
             <a:endParaRPr kumimoji="1" lang="ja-JP" altLang="en-US"/>
           </a:p>
@@ -3637,7 +3637,7 @@
         <p:spPr>
           <a:xfrm>
             <a:off x="567542" y="491954"/>
-            <a:ext cx="2646878" cy="584775"/>
+            <a:ext cx="7571303" cy="584775"/>
           </a:xfrm>
           <a:prstGeom prst="rect">
             <a:avLst/>
@@ -3652,7 +3652,7 @@
           <a:p>
             <a:r>
               <a:rPr lang="ja-JP" altLang="en-US" sz="3200" b="1" u="sng" dirty="0"/>
-              <a:t>純粋仮想関数</a:t>
+              <a:t>継承時のコンストラクタとデストラクタ</a:t>
             </a:r>
             <a:endParaRPr kumimoji="1" lang="ja-JP" altLang="en-US" sz="3200" b="1" u="sng" dirty="0"/>
           </a:p>
@@ -3791,7 +3791,7 @@
         <p:spPr>
           <a:xfrm>
             <a:off x="567542" y="491954"/>
-            <a:ext cx="2646878" cy="584775"/>
+            <a:ext cx="7571303" cy="584775"/>
           </a:xfrm>
           <a:prstGeom prst="rect">
             <a:avLst/>
@@ -3806,7 +3806,7 @@
           <a:p>
             <a:r>
               <a:rPr lang="ja-JP" altLang="en-US" sz="3200" b="1" u="sng" dirty="0"/>
-              <a:t>純粋仮想関数</a:t>
+              <a:t>継承時のコンストラクタとデストラクタ</a:t>
             </a:r>
             <a:endParaRPr kumimoji="1" lang="ja-JP" altLang="en-US" sz="3200" b="1" u="sng" dirty="0"/>
           </a:p>
@@ -4031,7 +4031,7 @@
         <p:spPr>
           <a:xfrm>
             <a:off x="567542" y="491954"/>
-            <a:ext cx="2646878" cy="584775"/>
+            <a:ext cx="7571303" cy="584775"/>
           </a:xfrm>
           <a:prstGeom prst="rect">
             <a:avLst/>
@@ -4046,7 +4046,7 @@
           <a:p>
             <a:r>
               <a:rPr lang="ja-JP" altLang="en-US" sz="3200" b="1" u="sng" dirty="0"/>
-              <a:t>純粋仮想関数</a:t>
+              <a:t>継承時のコンストラクタとデストラクタ</a:t>
             </a:r>
             <a:endParaRPr kumimoji="1" lang="ja-JP" altLang="en-US" sz="3200" b="1" u="sng" dirty="0"/>
           </a:p>
@@ -4219,7 +4219,7 @@
         <p:spPr>
           <a:xfrm>
             <a:off x="567542" y="491954"/>
-            <a:ext cx="2646878" cy="584775"/>
+            <a:ext cx="7571303" cy="584775"/>
           </a:xfrm>
           <a:prstGeom prst="rect">
             <a:avLst/>
@@ -4234,7 +4234,7 @@
           <a:p>
             <a:r>
               <a:rPr lang="ja-JP" altLang="en-US" sz="3200" b="1" u="sng" dirty="0"/>
-              <a:t>純粋仮想関数</a:t>
+              <a:t>継承時のコンストラクタとデストラクタ</a:t>
             </a:r>
             <a:endParaRPr kumimoji="1" lang="ja-JP" altLang="en-US" sz="3200" b="1" u="sng" dirty="0"/>
           </a:p>
@@ -4358,7 +4358,7 @@
         <p:spPr>
           <a:xfrm>
             <a:off x="567542" y="491954"/>
-            <a:ext cx="2646878" cy="584775"/>
+            <a:ext cx="7571303" cy="584775"/>
           </a:xfrm>
           <a:prstGeom prst="rect">
             <a:avLst/>
@@ -4373,7 +4373,7 @@
           <a:p>
             <a:r>
               <a:rPr lang="ja-JP" altLang="en-US" sz="3200" b="1" u="sng" dirty="0"/>
-              <a:t>純粋仮想関数</a:t>
+              <a:t>継承時のコンストラクタとデストラクタ</a:t>
             </a:r>
             <a:endParaRPr kumimoji="1" lang="ja-JP" altLang="en-US" sz="3200" b="1" u="sng" dirty="0"/>
           </a:p>
@@ -4394,7 +4394,7 @@
         <p:spPr>
           <a:xfrm>
             <a:off x="567542" y="1216429"/>
-            <a:ext cx="7802136" cy="830997"/>
+            <a:ext cx="8659743" cy="830997"/>
           </a:xfrm>
           <a:prstGeom prst="rect">
             <a:avLst/>
@@ -4424,12 +4424,12 @@
               <a:t>と</a:t>
             </a:r>
             <a:r>
-              <a:rPr lang="en-US" altLang="ja-JP" sz="2400" b="1" dirty="0">
+              <a:rPr lang="en-US" altLang="ja-JP" sz="2400" b="1" dirty="0" err="1">
                 <a:solidFill>
                   <a:srgbClr val="00B050"/>
                 </a:solidFill>
               </a:rPr>
-              <a:t>Fruit</a:t>
+              <a:t>Fruit,Meat</a:t>
             </a:r>
             <a:r>
               <a:rPr lang="ja-JP" altLang="en-US" sz="2400" dirty="0"/>
@@ -4617,7 +4617,7 @@
         <p:spPr>
           <a:xfrm>
             <a:off x="567542" y="491954"/>
-            <a:ext cx="2646878" cy="584775"/>
+            <a:ext cx="7571303" cy="584775"/>
           </a:xfrm>
           <a:prstGeom prst="rect">
             <a:avLst/>
@@ -4632,7 +4632,7 @@
           <a:p>
             <a:r>
               <a:rPr lang="ja-JP" altLang="en-US" sz="3200" b="1" u="sng" dirty="0"/>
-              <a:t>純粋仮想関数</a:t>
+              <a:t>継承時のコンストラクタとデストラクタ</a:t>
             </a:r>
             <a:endParaRPr kumimoji="1" lang="ja-JP" altLang="en-US" sz="3200" b="1" u="sng" dirty="0"/>
           </a:p>
@@ -4853,7 +4853,7 @@
         <p:spPr>
           <a:xfrm>
             <a:off x="567542" y="491954"/>
-            <a:ext cx="2646878" cy="584775"/>
+            <a:ext cx="7571303" cy="584775"/>
           </a:xfrm>
           <a:prstGeom prst="rect">
             <a:avLst/>
@@ -4868,7 +4868,7 @@
           <a:p>
             <a:r>
               <a:rPr lang="ja-JP" altLang="en-US" sz="3200" b="1" u="sng" dirty="0"/>
-              <a:t>純粋仮想関数</a:t>
+              <a:t>継承時のコンストラクタとデストラクタ</a:t>
             </a:r>
             <a:endParaRPr kumimoji="1" lang="ja-JP" altLang="en-US" sz="3200" b="1" u="sng" dirty="0"/>
           </a:p>
@@ -5076,7 +5076,7 @@
         <p:spPr>
           <a:xfrm>
             <a:off x="567542" y="491954"/>
-            <a:ext cx="2646878" cy="584775"/>
+            <a:ext cx="7571303" cy="584775"/>
           </a:xfrm>
           <a:prstGeom prst="rect">
             <a:avLst/>
@@ -5091,7 +5091,7 @@
           <a:p>
             <a:r>
               <a:rPr lang="ja-JP" altLang="en-US" sz="3200" b="1" u="sng" dirty="0"/>
-              <a:t>純粋仮想関数</a:t>
+              <a:t>継承時のコンストラクタとデストラクタ</a:t>
             </a:r>
             <a:endParaRPr kumimoji="1" lang="ja-JP" altLang="en-US" sz="3200" b="1" u="sng" dirty="0"/>
           </a:p>
@@ -5208,7 +5208,7 @@
         <p:spPr>
           <a:xfrm>
             <a:off x="567542" y="491954"/>
-            <a:ext cx="2646878" cy="584775"/>
+            <a:ext cx="7571303" cy="584775"/>
           </a:xfrm>
           <a:prstGeom prst="rect">
             <a:avLst/>
@@ -5223,7 +5223,7 @@
           <a:p>
             <a:r>
               <a:rPr lang="ja-JP" altLang="en-US" sz="3200" b="1" u="sng" dirty="0"/>
-              <a:t>純粋仮想関数</a:t>
+              <a:t>継承時のコンストラクタとデストラクタ</a:t>
             </a:r>
             <a:endParaRPr kumimoji="1" lang="ja-JP" altLang="en-US" sz="3200" b="1" u="sng" dirty="0"/>
           </a:p>
